--- a/Slides/Semana 1/semana_1_slides.pptx
+++ b/Slides/Semana 1/semana_1_slides.pptx
@@ -698,7 +698,15 @@
           <a:p>
             <a:r>
               <a:rPr lang="en-US" dirty="0"/>
-              <a:t/>
+              <a:t>FIGURA A PRODUZIR (nota do apresentador — não aparece no slide)
+Objetivo didático:
+Ilustrar como padrões reativos simples (sem aprendizado, sem planejamento) já produzem a percepção de "personalidade" em cada fantasma.
+Arquivo sugerido:
+assets/pacman-fantasmas-padroes.webp
+Descrição:
+Grade 2x2 mostrando os quatro fantasmas de *Pac-Man* (Blinky, Pinky, Inky, Clyde), cada um com uma seta esquemática indicando seu alvo de perseguição no labirinto.
+Como produzir:
+Captura de tela de emulador de domínio público ou ilustração esquemática própria feita no Krita, evitando reprodução de arte protegida sempre que possível.</a:t>
             </a:r>
             <a:endParaRPr lang="en-US" dirty="0"/>
           </a:p>
@@ -2194,7 +2202,15 @@
           <a:p>
             <a:r>
               <a:rPr lang="en-US" dirty="0"/>
-              <a:t/>
+              <a:t>FIGURA A PRODUZIR (nota do apresentador — não aparece no slide)
+Objetivo didático:
+Reforçar visualmente o ciclo Sentir-Pensar-Agir como modelo central que será retomado em todos os módulos seguintes.
+Arquivo sugerido:
+assets/ciclo-sentir-pensar-agir.webp
+Descrição:
+Diagrama circular com três blocos (Sentir, Pensar, Agir) conectados por setas em loop contínuo, com um ícone de NPC ao centro. Paleta institucional (índigo `#3b2f68` e verde `#b6d7a8`).
+Como produzir:
+Ilustração vetorial simples, produzível no Krita ou em qualquer editor de vetores; não requer modelagem 3D.</a:t>
             </a:r>
             <a:endParaRPr lang="en-US" dirty="0"/>
           </a:p>

--- a/Slides/Semana 1/semana_1_slides.pptx
+++ b/Slides/Semana 1/semana_1_slides.pptx
@@ -26,9 +26,10 @@
     <p:sldId id="274" r:id="rId20"/>
     <p:sldId id="275" r:id="rId21"/>
     <p:sldId id="276" r:id="rId22"/>
+    <p:sldId id="277" r:id="rId23"/>
   </p:sldIdLst>
   <p:notesMasterIdLst>
-    <p:notesMasterId r:id="rId23"/>
+    <p:notesMasterId r:id="rId24"/>
   </p:notesMasterIdLst>
   <p:sldSz cx="12192000" cy="6858000"/>
   <p:notesSz cx="6858000" cy="12192000"/>
@@ -698,6 +699,94 @@
           <a:p>
             <a:r>
               <a:rPr lang="en-US" dirty="0"/>
+              <a:t/>
+            </a:r>
+            <a:endParaRPr lang="en-US" dirty="0"/>
+          </a:p>
+        </p:txBody>
+      </p:sp>
+      <p:sp>
+        <p:nvSpPr>
+          <p:cNvPr id="4" name="Slide Number Placeholder 3"/>
+          <p:cNvSpPr>
+            <a:spLocks noGrp="1"/>
+          </p:cNvSpPr>
+          <p:nvPr>
+            <p:ph type="sldNum" sz="quarter" idx="10"/>
+          </p:nvPr>
+        </p:nvSpPr>
+        <p:spPr/>
+        <p:txBody>
+          <a:bodyPr/>
+          <a:lstStyle/>
+          <a:p>
+            <a:fld id="{F7021451-1387-4CA6-816F-3879F97B5CBC}" type="slidenum">
+              <a:rPr lang="en-US"/>
+              <a:t>11</a:t>
+            </a:fld>
+            <a:endParaRPr lang="en-US"/>
+          </a:p>
+        </p:txBody>
+      </p:sp>
+    </p:spTree>
+    <p:extLst>
+      <p:ext uri="{BB962C8B-B14F-4D97-AF65-F5344CB8AC3E}">
+        <p14:creationId xmlns:p14="http://schemas.microsoft.com/office/powerpoint/2010/main" val="1024086991"/>
+      </p:ext>
+    </p:extLst>
+  </p:cSld>
+  <p:clrMapOvr>
+    <a:masterClrMapping/>
+  </p:clrMapOvr>
+</p:notes>
+</file>
+
+<file path=ppt/notesSlides/notesSlide12.xml><?xml version="1.0" encoding="utf-8"?>
+<p:notes xmlns:a="http://schemas.openxmlformats.org/drawingml/2006/main" xmlns:r="http://schemas.openxmlformats.org/officeDocument/2006/relationships" xmlns:p="http://schemas.openxmlformats.org/presentationml/2006/main">
+  <p:cSld>
+    <p:spTree>
+      <p:nvGrpSpPr>
+        <p:cNvPr id="1" name=""/>
+        <p:cNvGrpSpPr/>
+        <p:nvPr/>
+      </p:nvGrpSpPr>
+      <p:grpSpPr>
+        <a:xfrm>
+          <a:off x="0" y="0"/>
+          <a:ext cx="0" cy="0"/>
+          <a:chOff x="0" y="0"/>
+          <a:chExt cx="0" cy="0"/>
+        </a:xfrm>
+      </p:grpSpPr>
+      <p:sp>
+        <p:nvSpPr>
+          <p:cNvPr id="2" name="Slide Image Placeholder 1"/>
+          <p:cNvSpPr>
+            <a:spLocks noGrp="1" noRot="1" noChangeAspect="1"/>
+          </p:cNvSpPr>
+          <p:nvPr>
+            <p:ph type="sldImg"/>
+          </p:nvPr>
+        </p:nvSpPr>
+        <p:spPr/>
+      </p:sp>
+      <p:sp>
+        <p:nvSpPr>
+          <p:cNvPr id="3" name="Notes Placeholder 2"/>
+          <p:cNvSpPr>
+            <a:spLocks noGrp="1"/>
+          </p:cNvSpPr>
+          <p:nvPr>
+            <p:ph type="body" idx="1"/>
+          </p:nvPr>
+        </p:nvSpPr>
+        <p:spPr/>
+        <p:txBody>
+          <a:bodyPr/>
+          <a:lstStyle/>
+          <a:p>
+            <a:r>
+              <a:rPr lang="en-US" dirty="0"/>
               <a:t>FIGURA A PRODUZIR (nota do apresentador — não aparece no slide)
 Objetivo didático:
 Ilustrar como padrões reativos simples (sem aprendizado, sem planejamento) já produzem a percepção de "personalidade" em cada fantasma.
@@ -729,7 +818,7 @@
           <a:p>
             <a:fld id="{F7021451-1387-4CA6-816F-3879F97B5CBC}" type="slidenum">
               <a:rPr lang="en-US"/>
-              <a:t>11</a:t>
+              <a:t>12</a:t>
             </a:fld>
             <a:endParaRPr lang="en-US"/>
           </a:p>
@@ -748,7 +837,7 @@
 </p:notes>
 </file>
 
-<file path=ppt/notesSlides/notesSlide12.xml><?xml version="1.0" encoding="utf-8"?>
+<file path=ppt/notesSlides/notesSlide13.xml><?xml version="1.0" encoding="utf-8"?>
 <p:notes xmlns:a="http://schemas.openxmlformats.org/drawingml/2006/main" xmlns:r="http://schemas.openxmlformats.org/officeDocument/2006/relationships" xmlns:p="http://schemas.openxmlformats.org/presentationml/2006/main">
   <p:cSld>
     <p:spTree>
@@ -817,7 +906,7 @@
           <a:p>
             <a:fld id="{F7021451-1387-4CA6-816F-3879F97B5CBC}" type="slidenum">
               <a:rPr lang="en-US"/>
-              <a:t>12</a:t>
+              <a:t>13</a:t>
             </a:fld>
             <a:endParaRPr lang="en-US"/>
           </a:p>
@@ -836,7 +925,7 @@
 </p:notes>
 </file>
 
-<file path=ppt/notesSlides/notesSlide13.xml><?xml version="1.0" encoding="utf-8"?>
+<file path=ppt/notesSlides/notesSlide14.xml><?xml version="1.0" encoding="utf-8"?>
 <p:notes xmlns:a="http://schemas.openxmlformats.org/drawingml/2006/main" xmlns:r="http://schemas.openxmlformats.org/officeDocument/2006/relationships" xmlns:p="http://schemas.openxmlformats.org/presentationml/2006/main">
   <p:cSld>
     <p:spTree>
@@ -905,7 +994,7 @@
           <a:p>
             <a:fld id="{F7021451-1387-4CA6-816F-3879F97B5CBC}" type="slidenum">
               <a:rPr lang="en-US"/>
-              <a:t>13</a:t>
+              <a:t>14</a:t>
             </a:fld>
             <a:endParaRPr lang="en-US"/>
           </a:p>
@@ -924,7 +1013,7 @@
 </p:notes>
 </file>
 
-<file path=ppt/notesSlides/notesSlide14.xml><?xml version="1.0" encoding="utf-8"?>
+<file path=ppt/notesSlides/notesSlide15.xml><?xml version="1.0" encoding="utf-8"?>
 <p:notes xmlns:a="http://schemas.openxmlformats.org/drawingml/2006/main" xmlns:r="http://schemas.openxmlformats.org/officeDocument/2006/relationships" xmlns:p="http://schemas.openxmlformats.org/presentationml/2006/main">
   <p:cSld>
     <p:spTree>
@@ -993,7 +1082,7 @@
           <a:p>
             <a:fld id="{F7021451-1387-4CA6-816F-3879F97B5CBC}" type="slidenum">
               <a:rPr lang="en-US"/>
-              <a:t>14</a:t>
+              <a:t>15</a:t>
             </a:fld>
             <a:endParaRPr lang="en-US"/>
           </a:p>
@@ -1012,7 +1101,7 @@
 </p:notes>
 </file>
 
-<file path=ppt/notesSlides/notesSlide15.xml><?xml version="1.0" encoding="utf-8"?>
+<file path=ppt/notesSlides/notesSlide16.xml><?xml version="1.0" encoding="utf-8"?>
 <p:notes xmlns:a="http://schemas.openxmlformats.org/drawingml/2006/main" xmlns:r="http://schemas.openxmlformats.org/officeDocument/2006/relationships" xmlns:p="http://schemas.openxmlformats.org/presentationml/2006/main">
   <p:cSld>
     <p:spTree>
@@ -1081,7 +1170,7 @@
           <a:p>
             <a:fld id="{F7021451-1387-4CA6-816F-3879F97B5CBC}" type="slidenum">
               <a:rPr lang="en-US"/>
-              <a:t>15</a:t>
+              <a:t>16</a:t>
             </a:fld>
             <a:endParaRPr lang="en-US"/>
           </a:p>
@@ -1100,7 +1189,7 @@
 </p:notes>
 </file>
 
-<file path=ppt/notesSlides/notesSlide16.xml><?xml version="1.0" encoding="utf-8"?>
+<file path=ppt/notesSlides/notesSlide17.xml><?xml version="1.0" encoding="utf-8"?>
 <p:notes xmlns:a="http://schemas.openxmlformats.org/drawingml/2006/main" xmlns:r="http://schemas.openxmlformats.org/officeDocument/2006/relationships" xmlns:p="http://schemas.openxmlformats.org/presentationml/2006/main">
   <p:cSld>
     <p:spTree>
@@ -1169,7 +1258,7 @@
           <a:p>
             <a:fld id="{F7021451-1387-4CA6-816F-3879F97B5CBC}" type="slidenum">
               <a:rPr lang="en-US"/>
-              <a:t>16</a:t>
+              <a:t>17</a:t>
             </a:fld>
             <a:endParaRPr lang="en-US"/>
           </a:p>
@@ -1188,7 +1277,7 @@
 </p:notes>
 </file>
 
-<file path=ppt/notesSlides/notesSlide17.xml><?xml version="1.0" encoding="utf-8"?>
+<file path=ppt/notesSlides/notesSlide18.xml><?xml version="1.0" encoding="utf-8"?>
 <p:notes xmlns:a="http://schemas.openxmlformats.org/drawingml/2006/main" xmlns:r="http://schemas.openxmlformats.org/officeDocument/2006/relationships" xmlns:p="http://schemas.openxmlformats.org/presentationml/2006/main">
   <p:cSld>
     <p:spTree>
@@ -1257,7 +1346,7 @@
           <a:p>
             <a:fld id="{F7021451-1387-4CA6-816F-3879F97B5CBC}" type="slidenum">
               <a:rPr lang="en-US"/>
-              <a:t>17</a:t>
+              <a:t>18</a:t>
             </a:fld>
             <a:endParaRPr lang="en-US"/>
           </a:p>
@@ -1276,7 +1365,7 @@
 </p:notes>
 </file>
 
-<file path=ppt/notesSlides/notesSlide18.xml><?xml version="1.0" encoding="utf-8"?>
+<file path=ppt/notesSlides/notesSlide19.xml><?xml version="1.0" encoding="utf-8"?>
 <p:notes xmlns:a="http://schemas.openxmlformats.org/drawingml/2006/main" xmlns:r="http://schemas.openxmlformats.org/officeDocument/2006/relationships" xmlns:p="http://schemas.openxmlformats.org/presentationml/2006/main">
   <p:cSld>
     <p:spTree>
@@ -1345,7 +1434,7 @@
           <a:p>
             <a:fld id="{F7021451-1387-4CA6-816F-3879F97B5CBC}" type="slidenum">
               <a:rPr lang="en-US"/>
-              <a:t>18</a:t>
+              <a:t>19</a:t>
             </a:fld>
             <a:endParaRPr lang="en-US"/>
           </a:p>
@@ -1364,7 +1453,7 @@
 </p:notes>
 </file>
 
-<file path=ppt/notesSlides/notesSlide19.xml><?xml version="1.0" encoding="utf-8"?>
+<file path=ppt/notesSlides/notesSlide2.xml><?xml version="1.0" encoding="utf-8"?>
 <p:notes xmlns:a="http://schemas.openxmlformats.org/drawingml/2006/main" xmlns:r="http://schemas.openxmlformats.org/officeDocument/2006/relationships" xmlns:p="http://schemas.openxmlformats.org/presentationml/2006/main">
   <p:cSld>
     <p:spTree>
@@ -1433,7 +1522,7 @@
           <a:p>
             <a:fld id="{F7021451-1387-4CA6-816F-3879F97B5CBC}" type="slidenum">
               <a:rPr lang="en-US"/>
-              <a:t>19</a:t>
+              <a:t>2</a:t>
             </a:fld>
             <a:endParaRPr lang="en-US"/>
           </a:p>
@@ -1452,7 +1541,7 @@
 </p:notes>
 </file>
 
-<file path=ppt/notesSlides/notesSlide2.xml><?xml version="1.0" encoding="utf-8"?>
+<file path=ppt/notesSlides/notesSlide20.xml><?xml version="1.0" encoding="utf-8"?>
 <p:notes xmlns:a="http://schemas.openxmlformats.org/drawingml/2006/main" xmlns:r="http://schemas.openxmlformats.org/officeDocument/2006/relationships" xmlns:p="http://schemas.openxmlformats.org/presentationml/2006/main">
   <p:cSld>
     <p:spTree>
@@ -1521,7 +1610,7 @@
           <a:p>
             <a:fld id="{F7021451-1387-4CA6-816F-3879F97B5CBC}" type="slidenum">
               <a:rPr lang="en-US"/>
-              <a:t>2</a:t>
+              <a:t>20</a:t>
             </a:fld>
             <a:endParaRPr lang="en-US"/>
           </a:p>
@@ -1540,7 +1629,7 @@
 </p:notes>
 </file>
 
-<file path=ppt/notesSlides/notesSlide20.xml><?xml version="1.0" encoding="utf-8"?>
+<file path=ppt/notesSlides/notesSlide21.xml><?xml version="1.0" encoding="utf-8"?>
 <p:notes xmlns:a="http://schemas.openxmlformats.org/drawingml/2006/main" xmlns:r="http://schemas.openxmlformats.org/officeDocument/2006/relationships" xmlns:p="http://schemas.openxmlformats.org/presentationml/2006/main">
   <p:cSld>
     <p:spTree>
@@ -1609,7 +1698,7 @@
           <a:p>
             <a:fld id="{F7021451-1387-4CA6-816F-3879F97B5CBC}" type="slidenum">
               <a:rPr lang="en-US"/>
-              <a:t>20</a:t>
+              <a:t>21</a:t>
             </a:fld>
             <a:endParaRPr lang="en-US"/>
           </a:p>
@@ -1628,7 +1717,7 @@
 </p:notes>
 </file>
 
-<file path=ppt/notesSlides/notesSlide21.xml><?xml version="1.0" encoding="utf-8"?>
+<file path=ppt/notesSlides/notesSlide22.xml><?xml version="1.0" encoding="utf-8"?>
 <p:notes xmlns:a="http://schemas.openxmlformats.org/drawingml/2006/main" xmlns:r="http://schemas.openxmlformats.org/officeDocument/2006/relationships" xmlns:p="http://schemas.openxmlformats.org/presentationml/2006/main">
   <p:cSld>
     <p:spTree>
@@ -1697,7 +1786,7 @@
           <a:p>
             <a:fld id="{F7021451-1387-4CA6-816F-3879F97B5CBC}" type="slidenum">
               <a:rPr lang="en-US"/>
-              <a:t>21</a:t>
+              <a:t>22</a:t>
             </a:fld>
             <a:endParaRPr lang="en-US"/>
           </a:p>
@@ -2157,6 +2246,94 @@
 </file>
 
 <file path=ppt/notesSlides/notesSlide8.xml><?xml version="1.0" encoding="utf-8"?>
+<p:notes xmlns:a="http://schemas.openxmlformats.org/drawingml/2006/main" xmlns:r="http://schemas.openxmlformats.org/officeDocument/2006/relationships" xmlns:p="http://schemas.openxmlformats.org/presentationml/2006/main">
+  <p:cSld>
+    <p:spTree>
+      <p:nvGrpSpPr>
+        <p:cNvPr id="1" name=""/>
+        <p:cNvGrpSpPr/>
+        <p:nvPr/>
+      </p:nvGrpSpPr>
+      <p:grpSpPr>
+        <a:xfrm>
+          <a:off x="0" y="0"/>
+          <a:ext cx="0" cy="0"/>
+          <a:chOff x="0" y="0"/>
+          <a:chExt cx="0" cy="0"/>
+        </a:xfrm>
+      </p:grpSpPr>
+      <p:sp>
+        <p:nvSpPr>
+          <p:cNvPr id="2" name="Slide Image Placeholder 1"/>
+          <p:cNvSpPr>
+            <a:spLocks noGrp="1" noRot="1" noChangeAspect="1"/>
+          </p:cNvSpPr>
+          <p:nvPr>
+            <p:ph type="sldImg"/>
+          </p:nvPr>
+        </p:nvSpPr>
+        <p:spPr/>
+      </p:sp>
+      <p:sp>
+        <p:nvSpPr>
+          <p:cNvPr id="3" name="Notes Placeholder 2"/>
+          <p:cNvSpPr>
+            <a:spLocks noGrp="1"/>
+          </p:cNvSpPr>
+          <p:nvPr>
+            <p:ph type="body" idx="1"/>
+          </p:nvPr>
+        </p:nvSpPr>
+        <p:spPr/>
+        <p:txBody>
+          <a:bodyPr/>
+          <a:lstStyle/>
+          <a:p>
+            <a:r>
+              <a:rPr lang="en-US" dirty="0"/>
+              <a:t/>
+            </a:r>
+            <a:endParaRPr lang="en-US" dirty="0"/>
+          </a:p>
+        </p:txBody>
+      </p:sp>
+      <p:sp>
+        <p:nvSpPr>
+          <p:cNvPr id="4" name="Slide Number Placeholder 3"/>
+          <p:cNvSpPr>
+            <a:spLocks noGrp="1"/>
+          </p:cNvSpPr>
+          <p:nvPr>
+            <p:ph type="sldNum" sz="quarter" idx="10"/>
+          </p:nvPr>
+        </p:nvSpPr>
+        <p:spPr/>
+        <p:txBody>
+          <a:bodyPr/>
+          <a:lstStyle/>
+          <a:p>
+            <a:fld id="{F7021451-1387-4CA6-816F-3879F97B5CBC}" type="slidenum">
+              <a:rPr lang="en-US"/>
+              <a:t>8</a:t>
+            </a:fld>
+            <a:endParaRPr lang="en-US"/>
+          </a:p>
+        </p:txBody>
+      </p:sp>
+    </p:spTree>
+    <p:extLst>
+      <p:ext uri="{BB962C8B-B14F-4D97-AF65-F5344CB8AC3E}">
+        <p14:creationId xmlns:p14="http://schemas.microsoft.com/office/powerpoint/2010/main" val="1024086991"/>
+      </p:ext>
+    </p:extLst>
+  </p:cSld>
+  <p:clrMapOvr>
+    <a:masterClrMapping/>
+  </p:clrMapOvr>
+</p:notes>
+</file>
+
+<file path=ppt/notesSlides/notesSlide9.xml><?xml version="1.0" encoding="utf-8"?>
 <p:notes xmlns:a="http://schemas.openxmlformats.org/drawingml/2006/main" xmlns:r="http://schemas.openxmlformats.org/officeDocument/2006/relationships" xmlns:p="http://schemas.openxmlformats.org/presentationml/2006/main">
   <p:cSld>
     <p:spTree>
@@ -2211,94 +2388,6 @@
 Diagrama circular com três blocos (Sentir, Pensar, Agir) conectados por setas em loop contínuo, com um ícone de NPC ao centro. Paleta institucional (índigo `#3b2f68` e verde `#b6d7a8`).
 Como produzir:
 Ilustração vetorial simples, produzível no Krita ou em qualquer editor de vetores; não requer modelagem 3D.</a:t>
-            </a:r>
-            <a:endParaRPr lang="en-US" dirty="0"/>
-          </a:p>
-        </p:txBody>
-      </p:sp>
-      <p:sp>
-        <p:nvSpPr>
-          <p:cNvPr id="4" name="Slide Number Placeholder 3"/>
-          <p:cNvSpPr>
-            <a:spLocks noGrp="1"/>
-          </p:cNvSpPr>
-          <p:nvPr>
-            <p:ph type="sldNum" sz="quarter" idx="10"/>
-          </p:nvPr>
-        </p:nvSpPr>
-        <p:spPr/>
-        <p:txBody>
-          <a:bodyPr/>
-          <a:lstStyle/>
-          <a:p>
-            <a:fld id="{F7021451-1387-4CA6-816F-3879F97B5CBC}" type="slidenum">
-              <a:rPr lang="en-US"/>
-              <a:t>8</a:t>
-            </a:fld>
-            <a:endParaRPr lang="en-US"/>
-          </a:p>
-        </p:txBody>
-      </p:sp>
-    </p:spTree>
-    <p:extLst>
-      <p:ext uri="{BB962C8B-B14F-4D97-AF65-F5344CB8AC3E}">
-        <p14:creationId xmlns:p14="http://schemas.microsoft.com/office/powerpoint/2010/main" val="1024086991"/>
-      </p:ext>
-    </p:extLst>
-  </p:cSld>
-  <p:clrMapOvr>
-    <a:masterClrMapping/>
-  </p:clrMapOvr>
-</p:notes>
-</file>
-
-<file path=ppt/notesSlides/notesSlide9.xml><?xml version="1.0" encoding="utf-8"?>
-<p:notes xmlns:a="http://schemas.openxmlformats.org/drawingml/2006/main" xmlns:r="http://schemas.openxmlformats.org/officeDocument/2006/relationships" xmlns:p="http://schemas.openxmlformats.org/presentationml/2006/main">
-  <p:cSld>
-    <p:spTree>
-      <p:nvGrpSpPr>
-        <p:cNvPr id="1" name=""/>
-        <p:cNvGrpSpPr/>
-        <p:nvPr/>
-      </p:nvGrpSpPr>
-      <p:grpSpPr>
-        <a:xfrm>
-          <a:off x="0" y="0"/>
-          <a:ext cx="0" cy="0"/>
-          <a:chOff x="0" y="0"/>
-          <a:chExt cx="0" cy="0"/>
-        </a:xfrm>
-      </p:grpSpPr>
-      <p:sp>
-        <p:nvSpPr>
-          <p:cNvPr id="2" name="Slide Image Placeholder 1"/>
-          <p:cNvSpPr>
-            <a:spLocks noGrp="1" noRot="1" noChangeAspect="1"/>
-          </p:cNvSpPr>
-          <p:nvPr>
-            <p:ph type="sldImg"/>
-          </p:nvPr>
-        </p:nvSpPr>
-        <p:spPr/>
-      </p:sp>
-      <p:sp>
-        <p:nvSpPr>
-          <p:cNvPr id="3" name="Notes Placeholder 2"/>
-          <p:cNvSpPr>
-            <a:spLocks noGrp="1"/>
-          </p:cNvSpPr>
-          <p:nvPr>
-            <p:ph type="body" idx="1"/>
-          </p:nvPr>
-        </p:nvSpPr>
-        <p:spPr/>
-        <p:txBody>
-          <a:bodyPr/>
-          <a:lstStyle/>
-          <a:p>
-            <a:r>
-              <a:rPr lang="en-US" dirty="0"/>
-              <a:t/>
             </a:r>
             <a:endParaRPr lang="en-US" dirty="0"/>
           </a:p>
@@ -3157,6 +3246,45 @@
 <file path=ppt/slides/slide21.xml><?xml version="1.0" encoding="utf-8"?>
 <p:sld xmlns:a="http://schemas.openxmlformats.org/drawingml/2006/main" xmlns:r="http://schemas.openxmlformats.org/officeDocument/2006/relationships" xmlns:p="http://schemas.openxmlformats.org/presentationml/2006/main">
   <p:cSld name="Slide 21">
+    <p:bg>
+      <p:bgPr>
+        <a:blipFill dpi="0" rotWithShape="1">
+          <a:blip r:embed="rId1">
+            <a:lum/>
+          </a:blip>
+          <a:srcRect/>
+          <a:stretch>
+            <a:fillRect/>
+          </a:stretch>
+        </a:blipFill>
+        <a:effectLst/>
+      </p:bgPr>
+    </p:bg>
+    <p:spTree>
+      <p:nvGrpSpPr>
+        <p:cNvPr id="1" name=""/>
+        <p:cNvGrpSpPr/>
+        <p:nvPr/>
+      </p:nvGrpSpPr>
+      <p:grpSpPr>
+        <a:xfrm>
+          <a:off x="0" y="0"/>
+          <a:ext cx="0" cy="0"/>
+          <a:chOff x="0" y="0"/>
+          <a:chExt cx="0" cy="0"/>
+        </a:xfrm>
+      </p:grpSpPr>
+    </p:spTree>
+  </p:cSld>
+  <p:clrMapOvr>
+    <a:masterClrMapping/>
+  </p:clrMapOvr>
+</p:sld>
+</file>
+
+<file path=ppt/slides/slide22.xml><?xml version="1.0" encoding="utf-8"?>
+<p:sld xmlns:a="http://schemas.openxmlformats.org/drawingml/2006/main" xmlns:r="http://schemas.openxmlformats.org/officeDocument/2006/relationships" xmlns:p="http://schemas.openxmlformats.org/presentationml/2006/main">
+  <p:cSld name="Slide 22">
     <p:bg>
       <p:bgPr>
         <a:blipFill dpi="0" rotWithShape="1">
